--- a/classes/parte-3-hacking-etico-y-pentesting-metodologia/066-metodologia-de-pentesting-ptes-y-osstmm/clase-066-presentacion.pptx
+++ b/classes/parte-3-hacking-etico-y-pentesting-metodologia/066-metodologia-de-pentesting-ptes-y-osstmm/clase-066-presentacion.pptx
@@ -17,6 +17,9 @@
     <p:sldId id="265" r:id="rId16"/>
     <p:sldId id="266" r:id="rId17"/>
     <p:sldId id="267" r:id="rId18"/>
+    <p:sldId id="268" r:id="rId19"/>
+    <p:sldId id="269" r:id="rId20"/>
+    <p:sldId id="270" r:id="rId21"/>
   </p:sldIdLst>
   <p:sldSz cx="9144000" cy="6858000" type="screen4x3"/>
   <p:notesSz cx="6858000" cy="9144000"/>
@@ -3198,7 +3201,7 @@
                   <a:srgbClr val="0B3D2E"/>
                 </a:solidFill>
               </a:rPr>
-              <a:t>⚠️ Errores comunes</a:t>
+              <a:t>✍️ Ejercicios</a:t>
             </a:r>
           </a:p>
         </p:txBody>
@@ -3236,97 +3239,97 @@
                   <a:srgbClr val="22282E"/>
                 </a:solidFill>
               </a:rPr>
-              <a:t>•  "Empecé a escanear sin plan y me perdí" — Falta de fase de threat modeling; define objetivos antes de tocar teclas</a:t>
-            </a:r>
-          </a:p>
-          <a:p>
-            <a:pPr>
-              <a:spcAft>
-                <a:spcPts val="600"/>
-              </a:spcAft>
-            </a:pPr>
-            <a:r>
-              <a:rPr sz="1500">
-                <a:solidFill>
-                  <a:srgbClr val="22282E"/>
-                </a:solidFill>
-              </a:rPr>
-              <a:t>•  Cliente enfadado por un servicio caído — No se documentaron técnicas prohibidas; añade DoS a exclusiones del RoE</a:t>
-            </a:r>
-          </a:p>
-          <a:p>
-            <a:pPr>
-              <a:spcAft>
-                <a:spcPts val="600"/>
-              </a:spcAft>
-            </a:pPr>
-            <a:r>
-              <a:rPr sz="1500">
-                <a:solidFill>
-                  <a:srgbClr val="22282E"/>
-                </a:solidFill>
-              </a:rPr>
-              <a:t>•  Informe sin priorización — Se saltó la fase de análisis; correlaciona hallazgos con impacto de negocio</a:t>
-            </a:r>
-          </a:p>
-          <a:p>
-            <a:pPr>
-              <a:spcAft>
-                <a:spcPts val="600"/>
-              </a:spcAft>
-            </a:pPr>
-            <a:r>
-              <a:rPr sz="1500">
-                <a:solidFill>
-                  <a:srgbClr val="22282E"/>
-                </a:solidFill>
-              </a:rPr>
-              <a:t>•  "El test no es comparable con el del año pasado" — No se usó una métrica; adopta el RAV de OSSTMM para tener línea base</a:t>
-            </a:r>
-          </a:p>
-          <a:p>
-            <a:pPr>
-              <a:spcAft>
-                <a:spcPts val="600"/>
-              </a:spcAft>
-            </a:pPr>
-            <a:r>
-              <a:rPr sz="1500">
-                <a:solidFill>
-                  <a:srgbClr val="22282E"/>
-                </a:solidFill>
-              </a:rPr>
-              <a:t>•  Confundir pentest con escaneo de vulnerabilidades — No hubo explotación ni prueba de impacto; aclara el tipo de servicio en el contrato</a:t>
-            </a:r>
-          </a:p>
-          <a:p>
-            <a:pPr>
-              <a:spcAft>
-                <a:spcPts val="600"/>
-              </a:spcAft>
-            </a:pPr>
-            <a:r>
-              <a:rPr sz="1500">
-                <a:solidFill>
-                  <a:srgbClr val="22282E"/>
-                </a:solidFill>
-              </a:rPr>
-              <a:t>•  Plan copiado de otro cliente sin adaptar — Se saltó el modelado de amenazas específico; identifica activos y actores propios de cada organización</a:t>
-            </a:r>
-          </a:p>
-          <a:p>
-            <a:pPr>
-              <a:spcAft>
-                <a:spcPts val="600"/>
-              </a:spcAft>
-            </a:pPr>
-            <a:r>
-              <a:rPr sz="1500">
-                <a:solidFill>
-                  <a:srgbClr val="22282E"/>
-                </a:solidFill>
-              </a:rPr>
-              <a:t>•  El equipo defensivo se entera del test por el informe final — No hubo coordinación purple team; define de antemano si el SOC será informado en tiempo real o a ciegas</a:t>
+              <a:t>•  Escribe con tus palabras la diferencia entre PTES y OSSTMM en menos de 80 palabras.</a:t>
+            </a:r>
+          </a:p>
+          <a:p>
+            <a:pPr>
+              <a:spcAft>
+                <a:spcPts val="600"/>
+              </a:spcAft>
+            </a:pPr>
+            <a:r>
+              <a:rPr sz="1500">
+                <a:solidFill>
+                  <a:srgbClr val="22282E"/>
+                </a:solidFill>
+              </a:rPr>
+              <a:t>•  Clasifica estas tareas por fase PTES: "buscar correos en LinkedIn", "lanzar un exploit SMB", "escribir el resumen ejecutivo".</a:t>
+            </a:r>
+          </a:p>
+          <a:p>
+            <a:pPr>
+              <a:spcAft>
+                <a:spcPts val="600"/>
+              </a:spcAft>
+            </a:pPr>
+            <a:r>
+              <a:rPr sz="1500">
+                <a:solidFill>
+                  <a:srgbClr val="22282E"/>
+                </a:solidFill>
+              </a:rPr>
+              <a:t>•  Diseña un plan de fases para un test white box de una API interna.</a:t>
+            </a:r>
+          </a:p>
+          <a:p>
+            <a:pPr>
+              <a:spcAft>
+                <a:spcPts val="600"/>
+              </a:spcAft>
+            </a:pPr>
+            <a:r>
+              <a:rPr sz="1500">
+                <a:solidFill>
+                  <a:srgbClr val="22282E"/>
+                </a:solidFill>
+              </a:rPr>
+              <a:t>•  Explica cuándo recomendarías un red team en lugar de un pentest tradicional.</a:t>
+            </a:r>
+          </a:p>
+          <a:p>
+            <a:pPr>
+              <a:spcAft>
+                <a:spcPts val="600"/>
+              </a:spcAft>
+            </a:pPr>
+            <a:r>
+              <a:rPr sz="1500">
+                <a:solidFill>
+                  <a:srgbClr val="22282E"/>
+                </a:solidFill>
+              </a:rPr>
+              <a:t>•  Construye una tabla comparativa de PTES, OSSTMM, NIST 800-115 y OWASP WSTG con al menos tres criterios.</a:t>
+            </a:r>
+          </a:p>
+          <a:p>
+            <a:pPr>
+              <a:spcAft>
+                <a:spcPts val="600"/>
+              </a:spcAft>
+            </a:pPr>
+            <a:r>
+              <a:rPr sz="1500">
+                <a:solidFill>
+                  <a:srgbClr val="22282E"/>
+                </a:solidFill>
+              </a:rPr>
+              <a:t>•  Redacta el argumento de una diapositiva que convenza a un cliente escéptico de pagar por metodología.</a:t>
+            </a:r>
+          </a:p>
+          <a:p>
+            <a:pPr>
+              <a:spcAft>
+                <a:spcPts val="600"/>
+              </a:spcAft>
+            </a:pPr>
+            <a:r>
+              <a:rPr sz="1500">
+                <a:solidFill>
+                  <a:srgbClr val="22282E"/>
+                </a:solidFill>
+              </a:rPr>
+              <a:t>•  Investiga qué es el CMM (Capability Maturity Model) aplicado a seguridad y relaciona un nivel de madurez con el tipo de test recomendado.</a:t>
             </a:r>
           </a:p>
         </p:txBody>
@@ -3377,7 +3380,7 @@
                   <a:srgbClr val="0B3D2E"/>
                 </a:solidFill>
               </a:rPr>
-              <a:t>❓ Preguntas frecuentes</a:t>
+              <a:t>📝 Reto verificable</a:t>
             </a:r>
           </a:p>
         </p:txBody>
@@ -3415,97 +3418,22 @@
                   <a:srgbClr val="22282E"/>
                 </a:solidFill>
               </a:rPr>
-              <a:t>•  ❓ ¿PTES y OSSTMM son excluyentes?</a:t>
-            </a:r>
-          </a:p>
-          <a:p>
-            <a:pPr>
-              <a:spcAft>
-                <a:spcPts val="600"/>
-              </a:spcAft>
-            </a:pPr>
-            <a:r>
-              <a:rPr sz="1500">
-                <a:solidFill>
-                  <a:srgbClr val="22282E"/>
-                </a:solidFill>
-              </a:rPr>
-              <a:t>•  No. PTES te da el proceso y OSSTMM te da las métricas. Muchos equipos usan PTES como columna vertebral y toman de OSSTMM la forma de cuantificar la superficie de ataque.</a:t>
-            </a:r>
-          </a:p>
-          <a:p>
-            <a:pPr>
-              <a:spcAft>
-                <a:spcPts val="600"/>
-              </a:spcAft>
-            </a:pPr>
-            <a:r>
-              <a:rPr sz="1500">
-                <a:solidFill>
-                  <a:srgbClr val="22282E"/>
-                </a:solidFill>
-              </a:rPr>
-              <a:t>•  ❓ ¿Necesito seguir una metodología si es solo un lab personal?</a:t>
-            </a:r>
-          </a:p>
-          <a:p>
-            <a:pPr>
-              <a:spcAft>
-                <a:spcPts val="600"/>
-              </a:spcAft>
-            </a:pPr>
-            <a:r>
-              <a:rPr sz="1500">
-                <a:solidFill>
-                  <a:srgbClr val="22282E"/>
-                </a:solidFill>
-              </a:rPr>
-              <a:t>•  Sí, por hábito. Practicar el proceso en el laboratorio hace que en un engagement real no improvises. Además te obliga a documentar, que es donde muchos principiantes fallan.</a:t>
-            </a:r>
-          </a:p>
-          <a:p>
-            <a:pPr>
-              <a:spcAft>
-                <a:spcPts val="600"/>
-              </a:spcAft>
-            </a:pPr>
-            <a:r>
-              <a:rPr sz="1500">
-                <a:solidFill>
-                  <a:srgbClr val="22282E"/>
-                </a:solidFill>
-              </a:rPr>
-              <a:t>•  ❓ ¿Qué metodología pide un cliente que busca cumplimiento PCI-DSS?</a:t>
-            </a:r>
-          </a:p>
-          <a:p>
-            <a:pPr>
-              <a:spcAft>
-                <a:spcPts val="600"/>
-              </a:spcAft>
-            </a:pPr>
-            <a:r>
-              <a:rPr sz="1500">
-                <a:solidFill>
-                  <a:srgbClr val="22282E"/>
-                </a:solidFill>
-              </a:rPr>
-              <a:t>•  Suele bastar con alinear el trabajo a NIST SP 800-115 y documentar cobertura; PTES organiza la ejecución. Confirma siempre el marco exigido antes de empezar.</a:t>
-            </a:r>
-          </a:p>
-          <a:p>
-            <a:pPr>
-              <a:spcAft>
-                <a:spcPts val="600"/>
-              </a:spcAft>
-            </a:pPr>
-            <a:r>
-              <a:rPr sz="1500">
-                <a:solidFill>
-                  <a:srgbClr val="22282E"/>
-                </a:solidFill>
-              </a:rPr>
-              <a:t>•  ❓ ¿El black box es "más realista" y por tanto mejor?</a:t>
+              <a:t>•  Produce un documento de plan de engagement de una página para un caso a tu elección que incluya: las 7 fases PTES con actividades, el tipo de test, el alcance con exclusiones, una métrica OSSTMM y el…</a:t>
+            </a:r>
+          </a:p>
+          <a:p>
+            <a:pPr>
+              <a:spcAft>
+                <a:spcPts val="600"/>
+              </a:spcAft>
+            </a:pPr>
+            <a:r>
+              <a:rPr sz="1500">
+                <a:solidFill>
+                  <a:srgbClr val="22282E"/>
+                </a:solidFill>
+              </a:rPr>
+              <a:t>•  Criterio de aceptación: el documento contiene las siete fases nombradas correctamente, un alcance con al menos una exclusión explícita y una métrica cuantitativa; otra persona podría leerlo y saber…</a:t>
             </a:r>
           </a:p>
         </p:txBody>
@@ -3556,7 +3484,7 @@
                   <a:srgbClr val="0B3D2E"/>
                 </a:solidFill>
               </a:rPr>
-              <a:t>🔗 Referencias</a:t>
+              <a:t>⚠️ Errores comunes</a:t>
             </a:r>
           </a:p>
         </p:txBody>
@@ -3594,6 +3522,364 @@
                   <a:srgbClr val="22282E"/>
                 </a:solidFill>
               </a:rPr>
+              <a:t>•  "Empecé a escanear sin plan y me perdí" — Falta de fase de threat modeling; define objetivos antes de tocar teclas</a:t>
+            </a:r>
+          </a:p>
+          <a:p>
+            <a:pPr>
+              <a:spcAft>
+                <a:spcPts val="600"/>
+              </a:spcAft>
+            </a:pPr>
+            <a:r>
+              <a:rPr sz="1500">
+                <a:solidFill>
+                  <a:srgbClr val="22282E"/>
+                </a:solidFill>
+              </a:rPr>
+              <a:t>•  Cliente enfadado por un servicio caído — No se documentaron técnicas prohibidas; añade DoS a exclusiones del RoE</a:t>
+            </a:r>
+          </a:p>
+          <a:p>
+            <a:pPr>
+              <a:spcAft>
+                <a:spcPts val="600"/>
+              </a:spcAft>
+            </a:pPr>
+            <a:r>
+              <a:rPr sz="1500">
+                <a:solidFill>
+                  <a:srgbClr val="22282E"/>
+                </a:solidFill>
+              </a:rPr>
+              <a:t>•  Informe sin priorización — Se saltó la fase de análisis; correlaciona hallazgos con impacto de negocio</a:t>
+            </a:r>
+          </a:p>
+          <a:p>
+            <a:pPr>
+              <a:spcAft>
+                <a:spcPts val="600"/>
+              </a:spcAft>
+            </a:pPr>
+            <a:r>
+              <a:rPr sz="1500">
+                <a:solidFill>
+                  <a:srgbClr val="22282E"/>
+                </a:solidFill>
+              </a:rPr>
+              <a:t>•  "El test no es comparable con el del año pasado" — No se usó una métrica; adopta el RAV de OSSTMM para tener línea base</a:t>
+            </a:r>
+          </a:p>
+          <a:p>
+            <a:pPr>
+              <a:spcAft>
+                <a:spcPts val="600"/>
+              </a:spcAft>
+            </a:pPr>
+            <a:r>
+              <a:rPr sz="1500">
+                <a:solidFill>
+                  <a:srgbClr val="22282E"/>
+                </a:solidFill>
+              </a:rPr>
+              <a:t>•  Confundir pentest con escaneo de vulnerabilidades — No hubo explotación ni prueba de impacto; aclara el tipo de servicio en el contrato</a:t>
+            </a:r>
+          </a:p>
+          <a:p>
+            <a:pPr>
+              <a:spcAft>
+                <a:spcPts val="600"/>
+              </a:spcAft>
+            </a:pPr>
+            <a:r>
+              <a:rPr sz="1500">
+                <a:solidFill>
+                  <a:srgbClr val="22282E"/>
+                </a:solidFill>
+              </a:rPr>
+              <a:t>•  Plan copiado de otro cliente sin adaptar — Se saltó el modelado de amenazas específico; identifica activos y actores propios de cada organización</a:t>
+            </a:r>
+          </a:p>
+          <a:p>
+            <a:pPr>
+              <a:spcAft>
+                <a:spcPts val="600"/>
+              </a:spcAft>
+            </a:pPr>
+            <a:r>
+              <a:rPr sz="1500">
+                <a:solidFill>
+                  <a:srgbClr val="22282E"/>
+                </a:solidFill>
+              </a:rPr>
+              <a:t>•  El equipo defensivo se entera del test por el informe final — No hubo coordinación purple team; define de antemano si el SOC será informado en tiempo real o a ciegas</a:t>
+            </a:r>
+          </a:p>
+        </p:txBody>
+      </p:sp>
+    </p:spTree>
+  </p:cSld>
+  <p:clrMapOvr>
+    <a:masterClrMapping/>
+  </p:clrMapOvr>
+</p:sld>
+</file>
+
+<file path=ppt/slides/slide13.xml><?xml version="1.0" encoding="utf-8"?>
+<p:sld xmlns:a="http://schemas.openxmlformats.org/drawingml/2006/main" xmlns:p="http://schemas.openxmlformats.org/presentationml/2006/main" xmlns:r="http://schemas.openxmlformats.org/officeDocument/2006/relationships">
+  <p:cSld>
+    <p:spTree>
+      <p:nvGrpSpPr>
+        <p:cNvPr id="1" name=""/>
+        <p:cNvGrpSpPr/>
+        <p:nvPr/>
+      </p:nvGrpSpPr>
+      <p:grpSpPr/>
+      <p:sp>
+        <p:nvSpPr>
+          <p:cNvPr id="2" name="TextBox 1"/>
+          <p:cNvSpPr txBox="1"/>
+          <p:nvPr/>
+        </p:nvSpPr>
+        <p:spPr>
+          <a:xfrm>
+            <a:off x="457200" y="320040"/>
+            <a:ext cx="8229600" cy="822960"/>
+          </a:xfrm>
+          <a:prstGeom prst="rect">
+            <a:avLst/>
+          </a:prstGeom>
+          <a:noFill/>
+        </p:spPr>
+        <p:txBody>
+          <a:bodyPr wrap="square">
+            <a:spAutoFit/>
+          </a:bodyPr>
+          <a:lstStyle/>
+          <a:p>
+            <a:r>
+              <a:rPr sz="2600" b="1">
+                <a:solidFill>
+                  <a:srgbClr val="0B3D2E"/>
+                </a:solidFill>
+              </a:rPr>
+              <a:t>❓ Preguntas frecuentes</a:t>
+            </a:r>
+          </a:p>
+        </p:txBody>
+      </p:sp>
+      <p:sp>
+        <p:nvSpPr>
+          <p:cNvPr id="3" name="TextBox 2"/>
+          <p:cNvSpPr txBox="1"/>
+          <p:nvPr/>
+        </p:nvSpPr>
+        <p:spPr>
+          <a:xfrm>
+            <a:off x="457200" y="1280160"/>
+            <a:ext cx="8229600" cy="4937760"/>
+          </a:xfrm>
+          <a:prstGeom prst="rect">
+            <a:avLst/>
+          </a:prstGeom>
+          <a:noFill/>
+        </p:spPr>
+        <p:txBody>
+          <a:bodyPr wrap="square">
+            <a:spAutoFit/>
+          </a:bodyPr>
+          <a:lstStyle/>
+          <a:p>
+            <a:pPr>
+              <a:spcAft>
+                <a:spcPts val="600"/>
+              </a:spcAft>
+            </a:pPr>
+            <a:r>
+              <a:rPr sz="1500">
+                <a:solidFill>
+                  <a:srgbClr val="22282E"/>
+                </a:solidFill>
+              </a:rPr>
+              <a:t>•  ❓ ¿PTES y OSSTMM son excluyentes?</a:t>
+            </a:r>
+          </a:p>
+          <a:p>
+            <a:pPr>
+              <a:spcAft>
+                <a:spcPts val="600"/>
+              </a:spcAft>
+            </a:pPr>
+            <a:r>
+              <a:rPr sz="1500">
+                <a:solidFill>
+                  <a:srgbClr val="22282E"/>
+                </a:solidFill>
+              </a:rPr>
+              <a:t>•  No. PTES te da el proceso y OSSTMM te da las métricas. Muchos equipos usan PTES como columna vertebral y toman de OSSTMM la forma de cuantificar la superficie de ataque.</a:t>
+            </a:r>
+          </a:p>
+          <a:p>
+            <a:pPr>
+              <a:spcAft>
+                <a:spcPts val="600"/>
+              </a:spcAft>
+            </a:pPr>
+            <a:r>
+              <a:rPr sz="1500">
+                <a:solidFill>
+                  <a:srgbClr val="22282E"/>
+                </a:solidFill>
+              </a:rPr>
+              <a:t>•  ❓ ¿Necesito seguir una metodología si es solo un lab personal?</a:t>
+            </a:r>
+          </a:p>
+          <a:p>
+            <a:pPr>
+              <a:spcAft>
+                <a:spcPts val="600"/>
+              </a:spcAft>
+            </a:pPr>
+            <a:r>
+              <a:rPr sz="1500">
+                <a:solidFill>
+                  <a:srgbClr val="22282E"/>
+                </a:solidFill>
+              </a:rPr>
+              <a:t>•  Sí, por hábito. Practicar el proceso en el laboratorio hace que en un engagement real no improvises. Además te obliga a documentar, que es donde muchos principiantes fallan.</a:t>
+            </a:r>
+          </a:p>
+          <a:p>
+            <a:pPr>
+              <a:spcAft>
+                <a:spcPts val="600"/>
+              </a:spcAft>
+            </a:pPr>
+            <a:r>
+              <a:rPr sz="1500">
+                <a:solidFill>
+                  <a:srgbClr val="22282E"/>
+                </a:solidFill>
+              </a:rPr>
+              <a:t>•  ❓ ¿Qué metodología pide un cliente que busca cumplimiento PCI-DSS?</a:t>
+            </a:r>
+          </a:p>
+          <a:p>
+            <a:pPr>
+              <a:spcAft>
+                <a:spcPts val="600"/>
+              </a:spcAft>
+            </a:pPr>
+            <a:r>
+              <a:rPr sz="1500">
+                <a:solidFill>
+                  <a:srgbClr val="22282E"/>
+                </a:solidFill>
+              </a:rPr>
+              <a:t>•  Suele bastar con alinear el trabajo a NIST SP 800-115 y documentar cobertura; PTES organiza la ejecución. Confirma siempre el marco exigido antes de empezar.</a:t>
+            </a:r>
+          </a:p>
+          <a:p>
+            <a:pPr>
+              <a:spcAft>
+                <a:spcPts val="600"/>
+              </a:spcAft>
+            </a:pPr>
+            <a:r>
+              <a:rPr sz="1500">
+                <a:solidFill>
+                  <a:srgbClr val="22282E"/>
+                </a:solidFill>
+              </a:rPr>
+              <a:t>•  ❓ ¿El black box es "más realista" y por tanto mejor?</a:t>
+            </a:r>
+          </a:p>
+        </p:txBody>
+      </p:sp>
+    </p:spTree>
+  </p:cSld>
+  <p:clrMapOvr>
+    <a:masterClrMapping/>
+  </p:clrMapOvr>
+</p:sld>
+</file>
+
+<file path=ppt/slides/slide14.xml><?xml version="1.0" encoding="utf-8"?>
+<p:sld xmlns:a="http://schemas.openxmlformats.org/drawingml/2006/main" xmlns:p="http://schemas.openxmlformats.org/presentationml/2006/main" xmlns:r="http://schemas.openxmlformats.org/officeDocument/2006/relationships">
+  <p:cSld>
+    <p:spTree>
+      <p:nvGrpSpPr>
+        <p:cNvPr id="1" name=""/>
+        <p:cNvGrpSpPr/>
+        <p:nvPr/>
+      </p:nvGrpSpPr>
+      <p:grpSpPr/>
+      <p:sp>
+        <p:nvSpPr>
+          <p:cNvPr id="2" name="TextBox 1"/>
+          <p:cNvSpPr txBox="1"/>
+          <p:nvPr/>
+        </p:nvSpPr>
+        <p:spPr>
+          <a:xfrm>
+            <a:off x="457200" y="320040"/>
+            <a:ext cx="8229600" cy="822960"/>
+          </a:xfrm>
+          <a:prstGeom prst="rect">
+            <a:avLst/>
+          </a:prstGeom>
+          <a:noFill/>
+        </p:spPr>
+        <p:txBody>
+          <a:bodyPr wrap="square">
+            <a:spAutoFit/>
+          </a:bodyPr>
+          <a:lstStyle/>
+          <a:p>
+            <a:r>
+              <a:rPr sz="2600" b="1">
+                <a:solidFill>
+                  <a:srgbClr val="0B3D2E"/>
+                </a:solidFill>
+              </a:rPr>
+              <a:t>🔗 Referencias</a:t>
+            </a:r>
+          </a:p>
+        </p:txBody>
+      </p:sp>
+      <p:sp>
+        <p:nvSpPr>
+          <p:cNvPr id="3" name="TextBox 2"/>
+          <p:cNvSpPr txBox="1"/>
+          <p:nvPr/>
+        </p:nvSpPr>
+        <p:spPr>
+          <a:xfrm>
+            <a:off x="457200" y="1280160"/>
+            <a:ext cx="8229600" cy="4937760"/>
+          </a:xfrm>
+          <a:prstGeom prst="rect">
+            <a:avLst/>
+          </a:prstGeom>
+          <a:noFill/>
+        </p:spPr>
+        <p:txBody>
+          <a:bodyPr wrap="square">
+            <a:spAutoFit/>
+          </a:bodyPr>
+          <a:lstStyle/>
+          <a:p>
+            <a:pPr>
+              <a:spcAft>
+                <a:spcPts val="600"/>
+              </a:spcAft>
+            </a:pPr>
+            <a:r>
+              <a:rPr sz="1500">
+                <a:solidFill>
+                  <a:srgbClr val="22282E"/>
+                </a:solidFill>
+              </a:rPr>
               <a:t>•  PTES — &lt;http://www.pentest-standard.org/index.php/MainPage&gt;</a:t>
             </a:r>
           </a:p>
@@ -3689,6 +3975,81 @@
           </a:p>
         </p:txBody>
       </p:sp>
+    </p:spTree>
+  </p:cSld>
+  <p:clrMapOvr>
+    <a:masterClrMapping/>
+  </p:clrMapOvr>
+</p:sld>
+</file>
+
+<file path=ppt/slides/slide15.xml><?xml version="1.0" encoding="utf-8"?>
+<p:sld xmlns:a="http://schemas.openxmlformats.org/drawingml/2006/main" xmlns:p="http://schemas.openxmlformats.org/presentationml/2006/main" xmlns:r="http://schemas.openxmlformats.org/officeDocument/2006/relationships">
+  <p:cSld>
+    <p:spTree>
+      <p:nvGrpSpPr>
+        <p:cNvPr id="1" name=""/>
+        <p:cNvGrpSpPr/>
+        <p:nvPr/>
+      </p:nvGrpSpPr>
+      <p:grpSpPr/>
+      <p:sp>
+        <p:nvSpPr>
+          <p:cNvPr id="2" name="TextBox 1"/>
+          <p:cNvSpPr txBox="1"/>
+          <p:nvPr/>
+        </p:nvSpPr>
+        <p:spPr>
+          <a:xfrm>
+            <a:off x="457200" y="274320"/>
+            <a:ext cx="8229600" cy="640080"/>
+          </a:xfrm>
+          <a:prstGeom prst="rect">
+            <a:avLst/>
+          </a:prstGeom>
+          <a:noFill/>
+        </p:spPr>
+        <p:txBody>
+          <a:bodyPr wrap="square">
+            <a:spAutoFit/>
+          </a:bodyPr>
+          <a:lstStyle/>
+          <a:p>
+            <a:r>
+              <a:rPr sz="2200" b="1">
+                <a:solidFill>
+                  <a:srgbClr val="0B3D2E"/>
+                </a:solidFill>
+              </a:rPr>
+              <a:t>Diagrama de la clase</a:t>
+            </a:r>
+          </a:p>
+        </p:txBody>
+      </p:sp>
+      <p:pic>
+        <p:nvPicPr>
+          <p:cNvPr id="3" name="Picture 2" descr="a3c41442b36fb76b.png"/>
+          <p:cNvPicPr>
+            <a:picLocks noChangeAspect="1"/>
+          </p:cNvPicPr>
+          <p:nvPr/>
+        </p:nvPicPr>
+        <p:blipFill>
+          <a:blip r:embed="rId2"/>
+          <a:stretch>
+            <a:fillRect/>
+          </a:stretch>
+        </p:blipFill>
+        <p:spPr>
+          <a:xfrm>
+            <a:off x="3286374" y="1097280"/>
+            <a:ext cx="2571251" cy="5303520"/>
+          </a:xfrm>
+          <a:prstGeom prst="rect">
+            <a:avLst/>
+          </a:prstGeom>
+        </p:spPr>
+      </p:pic>
     </p:spTree>
   </p:cSld>
   <p:clrMapOvr>
@@ -3773,7 +4134,7 @@
                   <a:srgbClr val="22282E"/>
                 </a:solidFill>
               </a:rPr>
-              <a:t>•  Entender por qué un pentest necesita una metodología formal y dominar las dos referencias más usadas de la industria: el PTES (siete fases de ejecución) y el OSSTMM (medición de la superficie de ataque y controles). Al final, el alumno sabrá encuadrar cualquier trabajo ofensivo dentro de un proceso auditable, repetible y comparable entre engagements.</a:t>
+              <a:t>•  Entender por qué un pentest necesita una metodología formal y dominar las dos referencias más usadas de la industria: el PTES (siete fases de ejecución) y el OSSTMM (medición de la superficie de…</a:t>
             </a:r>
           </a:p>
         </p:txBody>
@@ -4167,7 +4528,7 @@
                   <a:srgbClr val="0B3D2E"/>
                 </a:solidFill>
               </a:rPr>
-              <a:t>📖 Definiciones y características</a:t>
+              <a:t>🧠 Explicación en profundidad</a:t>
             </a:r>
           </a:p>
         </p:txBody>
@@ -4205,97 +4566,97 @@
                   <a:srgbClr val="22282E"/>
                 </a:solidFill>
               </a:rPr>
-              <a:t>•  PTES (Penetration Testing Execution Standard): marco de proceso en siete fases (pre-engagement, intelligence gathering, threat modeling, vulnerability analysis, exploitation, post-exploitation, reporting). Característica clave: describe qué hacer en cada fase, no cómo con herramientas concretas.</a:t>
-            </a:r>
-          </a:p>
-          <a:p>
-            <a:pPr>
-              <a:spcAft>
-                <a:spcPts val="600"/>
-              </a:spcAft>
-            </a:pPr>
-            <a:r>
-              <a:rPr sz="1500">
-                <a:solidFill>
-                  <a:srgbClr val="22282E"/>
-                </a:solidFill>
-              </a:rPr>
-              <a:t>•  OSSTMM (Open Source Security Testing Methodology Manual): metodología de ISECOM centrada en medir operacionalmente la seguridad. Característica clave: define el RAV (Risk Assessment Value), una métrica cuantitativa de la superficie de ataque.</a:t>
-            </a:r>
-          </a:p>
-          <a:p>
-            <a:pPr>
-              <a:spcAft>
-                <a:spcPts val="600"/>
-              </a:spcAft>
-            </a:pPr>
-            <a:r>
-              <a:rPr sz="1500">
-                <a:solidFill>
-                  <a:srgbClr val="22282E"/>
-                </a:solidFill>
-              </a:rPr>
-              <a:t>•  Superficie de ataque: conjunto de puntos donde un atacante puede interactuar con el sistema. Característica clave: se reduce controlando visibilidad, acceso y confianza.</a:t>
-            </a:r>
-          </a:p>
-          <a:p>
-            <a:pPr>
-              <a:spcAft>
-                <a:spcPts val="600"/>
-              </a:spcAft>
-            </a:pPr>
-            <a:r>
-              <a:rPr sz="1500">
-                <a:solidFill>
-                  <a:srgbClr val="22282E"/>
-                </a:solidFill>
-              </a:rPr>
-              <a:t>•  Scope (alcance): frontera explícita de lo autorizado (IPs, dominios, horarios, técnicas permitidas). Característica clave: todo lo no incluido está prohibido por defecto.</a:t>
-            </a:r>
-          </a:p>
-          <a:p>
-            <a:pPr>
-              <a:spcAft>
-                <a:spcPts val="600"/>
-              </a:spcAft>
-            </a:pPr>
-            <a:r>
-              <a:rPr sz="1500">
-                <a:solidFill>
-                  <a:srgbClr val="22282E"/>
-                </a:solidFill>
-              </a:rPr>
-              <a:t>•  Black/Gray/White box: niveles de conocimiento previo entregado al equipo. Característica clave: a menos información, más se parece a un atacante externo real, pero menos cobertura por tiempo.</a:t>
-            </a:r>
-          </a:p>
-          <a:p>
-            <a:pPr>
-              <a:spcAft>
-                <a:spcPts val="600"/>
-              </a:spcAft>
-            </a:pPr>
-            <a:r>
-              <a:rPr sz="1500">
-                <a:solidFill>
-                  <a:srgbClr val="22282E"/>
-                </a:solidFill>
-              </a:rPr>
-              <a:t>•  RAV: puntuación OSSTMM que combina porosidad, controles y limitaciones. Característica clave: permite comparar el estado antes/después de remediar.</a:t>
-            </a:r>
-          </a:p>
-          <a:p>
-            <a:pPr>
-              <a:spcAft>
-                <a:spcPts val="600"/>
-              </a:spcAft>
-            </a:pPr>
-            <a:r>
-              <a:rPr sz="1500">
-                <a:solidFill>
-                  <a:srgbClr val="22282E"/>
-                </a:solidFill>
-              </a:rPr>
-              <a:t>•  Threat modeling (modelado de amenazas): fase del PTES donde se identifican los activos críticos y los actores que podrían atacarlos. Característica clave: prioriza el esfuerzo de explotación hacia lo que más le importa al negocio, no hacia lo primero que se encuentra.</a:t>
+              <a:t>•  La diferencia entre un pentester y alguien que simplemente sabe usar herramientas es el</a:t>
+            </a:r>
+          </a:p>
+          <a:p>
+            <a:pPr>
+              <a:spcAft>
+                <a:spcPts val="600"/>
+              </a:spcAft>
+            </a:pPr>
+            <a:r>
+              <a:rPr sz="1500">
+                <a:solidFill>
+                  <a:srgbClr val="22282E"/>
+                </a:solidFill>
+              </a:rPr>
+              <a:t>•  método. Un proceso repetible da tres cosas que el acceso aislado no da: cobertura</a:t>
+            </a:r>
+          </a:p>
+          <a:p>
+            <a:pPr>
+              <a:spcAft>
+                <a:spcPts val="600"/>
+              </a:spcAft>
+            </a:pPr>
+            <a:r>
+              <a:rPr sz="1500">
+                <a:solidFill>
+                  <a:srgbClr val="22282E"/>
+                </a:solidFill>
+              </a:rPr>
+              <a:t>•  (la garantía de no dejar zonas sin mirar por ir a lo llamativo), defensa jurídica (un</a:t>
+            </a:r>
+          </a:p>
+          <a:p>
+            <a:pPr>
+              <a:spcAft>
+                <a:spcPts val="600"/>
+              </a:spcAft>
+            </a:pPr>
+            <a:r>
+              <a:rPr sz="1500">
+                <a:solidFill>
+                  <a:srgbClr val="22282E"/>
+                </a:solidFill>
+              </a:rPr>
+              <a:t>•  registro de qué se hizo, cuándo y con qué autorización) y valor para el cliente, que no</a:t>
+            </a:r>
+          </a:p>
+          <a:p>
+            <a:pPr>
+              <a:spcAft>
+                <a:spcPts val="600"/>
+              </a:spcAft>
+            </a:pPr>
+            <a:r>
+              <a:rPr sz="1500">
+                <a:solidFill>
+                  <a:srgbClr val="22282E"/>
+                </a:solidFill>
+              </a:rPr>
+              <a:t>•  paga por un "estoy dentro" sino por un mapa de su riesgo y una ruta de remediación. Un</a:t>
+            </a:r>
+          </a:p>
+          <a:p>
+            <a:pPr>
+              <a:spcAft>
+                <a:spcPts val="600"/>
+              </a:spcAft>
+            </a:pPr>
+            <a:r>
+              <a:rPr sz="1500">
+                <a:solidFill>
+                  <a:srgbClr val="22282E"/>
+                </a:solidFill>
+              </a:rPr>
+              <a:t>•  hallazgo espectacular sin proceso alrededor es una anécdota; el mismo hallazgo dentro de</a:t>
+            </a:r>
+          </a:p>
+          <a:p>
+            <a:pPr>
+              <a:spcAft>
+                <a:spcPts val="600"/>
+              </a:spcAft>
+            </a:pPr>
+            <a:r>
+              <a:rPr sz="1500">
+                <a:solidFill>
+                  <a:srgbClr val="22282E"/>
+                </a:solidFill>
+              </a:rPr>
+              <a:t>•  una metodología es un informe accionable.</a:t>
             </a:r>
           </a:p>
         </p:txBody>
@@ -4346,7 +4707,7 @@
                   <a:srgbClr val="0B3D2E"/>
                 </a:solidFill>
               </a:rPr>
-              <a:t>🧰 Herramientas y preparación</a:t>
+              <a:t>📖 Definiciones y características</a:t>
             </a:r>
           </a:p>
         </p:txBody>
@@ -4384,67 +4745,97 @@
                   <a:srgbClr val="22282E"/>
                 </a:solidFill>
               </a:rPr>
-              <a:t>•  Esta clase es metodológica, no ofensiva: no se ataca ningún sistema. Prepara:</a:t>
-            </a:r>
-          </a:p>
-          <a:p>
-            <a:pPr>
-              <a:spcAft>
-                <a:spcPts val="600"/>
-              </a:spcAft>
-            </a:pPr>
-            <a:r>
-              <a:rPr sz="1500">
-                <a:solidFill>
-                  <a:srgbClr val="22282E"/>
-                </a:solidFill>
-              </a:rPr>
-              <a:t>•  Los documentos de referencia: PTES (pentest-standard.org), OSSTMM 3 (PDF de ISECOM), NIST SP 800-115 y OWASP WSTG.</a:t>
-            </a:r>
-          </a:p>
-          <a:p>
-            <a:pPr>
-              <a:spcAft>
-                <a:spcPts val="600"/>
-              </a:spcAft>
-            </a:pPr>
-            <a:r>
-              <a:rPr sz="1500">
-                <a:solidFill>
-                  <a:srgbClr val="22282E"/>
-                </a:solidFill>
-              </a:rPr>
-              <a:t>•  Una plantilla de plan de engagement (hoja de cálculo o documento) con columnas: fase, actividades, herramientas previstas, entregable, duración.</a:t>
-            </a:r>
-          </a:p>
-          <a:p>
-            <a:pPr>
-              <a:spcAft>
-                <a:spcPts val="600"/>
-              </a:spcAft>
-            </a:pPr>
-            <a:r>
-              <a:rPr sz="1500">
-                <a:solidFill>
-                  <a:srgbClr val="22282E"/>
-                </a:solidFill>
-              </a:rPr>
-              <a:t>•  Un gestor de notas para pentest (CherryTree, Obsidian o un repositorio Markdown) que usarás durante toda la parte.</a:t>
-            </a:r>
-          </a:p>
-          <a:p>
-            <a:pPr>
-              <a:spcAft>
-                <a:spcPts val="600"/>
-              </a:spcAft>
-            </a:pPr>
-            <a:r>
-              <a:rPr sz="1500">
-                <a:solidFill>
-                  <a:srgbClr val="22282E"/>
-                </a:solidFill>
-              </a:rPr>
-              <a:t>•  Un "playbook interno" propio: una carpeta versionada donde acumules plantillas de RoE, checklists de fases y modelos de informe, para no reinventar el proceso en cada clase.</a:t>
+              <a:t>•  PTES (Penetration Testing Execution Standard): marco de proceso en siete fases (pre-engagement, intelligence gathering, threat modeling, vulnerability analysis, exploitation, post-exploitation…</a:t>
+            </a:r>
+          </a:p>
+          <a:p>
+            <a:pPr>
+              <a:spcAft>
+                <a:spcPts val="600"/>
+              </a:spcAft>
+            </a:pPr>
+            <a:r>
+              <a:rPr sz="1500">
+                <a:solidFill>
+                  <a:srgbClr val="22282E"/>
+                </a:solidFill>
+              </a:rPr>
+              <a:t>•  OSSTMM (Open Source Security Testing Methodology Manual): metodología de ISECOM centrada en medir operacionalmente la seguridad. Característica clave: define el RAV (Risk Assessment Value), una…</a:t>
+            </a:r>
+          </a:p>
+          <a:p>
+            <a:pPr>
+              <a:spcAft>
+                <a:spcPts val="600"/>
+              </a:spcAft>
+            </a:pPr>
+            <a:r>
+              <a:rPr sz="1500">
+                <a:solidFill>
+                  <a:srgbClr val="22282E"/>
+                </a:solidFill>
+              </a:rPr>
+              <a:t>•  Superficie de ataque: conjunto de puntos donde un atacante puede interactuar con el sistema. Característica clave: se reduce controlando visibilidad, acceso y confianza.</a:t>
+            </a:r>
+          </a:p>
+          <a:p>
+            <a:pPr>
+              <a:spcAft>
+                <a:spcPts val="600"/>
+              </a:spcAft>
+            </a:pPr>
+            <a:r>
+              <a:rPr sz="1500">
+                <a:solidFill>
+                  <a:srgbClr val="22282E"/>
+                </a:solidFill>
+              </a:rPr>
+              <a:t>•  Scope (alcance): frontera explícita de lo autorizado (IPs, dominios, horarios, técnicas permitidas). Característica clave: todo lo no incluido está prohibido por defecto.</a:t>
+            </a:r>
+          </a:p>
+          <a:p>
+            <a:pPr>
+              <a:spcAft>
+                <a:spcPts val="600"/>
+              </a:spcAft>
+            </a:pPr>
+            <a:r>
+              <a:rPr sz="1500">
+                <a:solidFill>
+                  <a:srgbClr val="22282E"/>
+                </a:solidFill>
+              </a:rPr>
+              <a:t>•  Black/Gray/White box: niveles de conocimiento previo entregado al equipo. Característica clave: a menos información, más se parece a un atacante externo real, pero menos cobertura por tiempo.</a:t>
+            </a:r>
+          </a:p>
+          <a:p>
+            <a:pPr>
+              <a:spcAft>
+                <a:spcPts val="600"/>
+              </a:spcAft>
+            </a:pPr>
+            <a:r>
+              <a:rPr sz="1500">
+                <a:solidFill>
+                  <a:srgbClr val="22282E"/>
+                </a:solidFill>
+              </a:rPr>
+              <a:t>•  RAV: puntuación OSSTMM que combina porosidad, controles y limitaciones. Característica clave: permite comparar el estado antes/después de remediar.</a:t>
+            </a:r>
+          </a:p>
+          <a:p>
+            <a:pPr>
+              <a:spcAft>
+                <a:spcPts val="600"/>
+              </a:spcAft>
+            </a:pPr>
+            <a:r>
+              <a:rPr sz="1500">
+                <a:solidFill>
+                  <a:srgbClr val="22282E"/>
+                </a:solidFill>
+              </a:rPr>
+              <a:t>•  Threat modeling (modelado de amenazas): fase del PTES donde se identifican los activos críticos y los actores que podrían atacarlos. Característica clave: prioriza el esfuerzo de explotación hacia lo…</a:t>
             </a:r>
           </a:p>
         </p:txBody>
@@ -4495,7 +4886,7 @@
                   <a:srgbClr val="0B3D2E"/>
                 </a:solidFill>
               </a:rPr>
-              <a:t>🧪 Laboratorio guiado (ejercicio aplicado)</a:t>
+              <a:t>📔 Glosario</a:t>
             </a:r>
           </a:p>
         </p:txBody>
@@ -4533,97 +4924,97 @@
                   <a:srgbClr val="22282E"/>
                 </a:solidFill>
               </a:rPr>
-              <a:t>•  Como esta clase es conceptual, el laboratorio es un ejercicio de planificación.</a:t>
-            </a:r>
-          </a:p>
-          <a:p>
-            <a:pPr>
-              <a:spcAft>
-                <a:spcPts val="600"/>
-              </a:spcAft>
-            </a:pPr>
-            <a:r>
-              <a:rPr sz="1500">
-                <a:solidFill>
-                  <a:srgbClr val="22282E"/>
-                </a:solidFill>
-              </a:rPr>
-              <a:t>•  Toma un caso ficticio: "Pyme de e-commerce, 2 servidores web públicos, 1 rango interno /24, quieren saber si un atacante externo llega a la base de datos de clientes".</a:t>
-            </a:r>
-          </a:p>
-          <a:p>
-            <a:pPr>
-              <a:spcAft>
-                <a:spcPts val="600"/>
-              </a:spcAft>
-            </a:pPr>
-            <a:r>
-              <a:rPr sz="1500">
-                <a:solidFill>
-                  <a:srgbClr val="22282E"/>
-                </a:solidFill>
-              </a:rPr>
-              <a:t>•  Crea una tabla con las siete fases del PTES y rellena, para cada una, dos actividades concretas que harías en este caso.</a:t>
-            </a:r>
-          </a:p>
-          <a:p>
-            <a:pPr>
-              <a:spcAft>
-                <a:spcPts val="600"/>
-              </a:spcAft>
-            </a:pPr>
-            <a:r>
-              <a:rPr sz="1500">
-                <a:solidFill>
-                  <a:srgbClr val="22282E"/>
-                </a:solidFill>
-              </a:rPr>
-              <a:t>•  Define el tipo de test (black/gray/white box) y justifica tu elección en 3 líneas.</a:t>
-            </a:r>
-          </a:p>
-          <a:p>
-            <a:pPr>
-              <a:spcAft>
-                <a:spcPts val="600"/>
-              </a:spcAft>
-            </a:pPr>
-            <a:r>
-              <a:rPr sz="1500">
-                <a:solidFill>
-                  <a:srgbClr val="22282E"/>
-                </a:solidFill>
-              </a:rPr>
-              <a:t>•  Especifica el alcance: qué IPs/dominios entran, qué queda excluido, ventana horaria y técnicas prohibidas (por ejemplo, denegación de servicio).</a:t>
-            </a:r>
-          </a:p>
-          <a:p>
-            <a:pPr>
-              <a:spcAft>
-                <a:spcPts val="600"/>
-              </a:spcAft>
-            </a:pPr>
-            <a:r>
-              <a:rPr sz="1500">
-                <a:solidFill>
-                  <a:srgbClr val="22282E"/>
-                </a:solidFill>
-              </a:rPr>
-              <a:t>•  Para el mismo caso, describe una métrica OSSTMM que reportarías (por ejemplo, número de servicios expuestos vs. controlados).</a:t>
-            </a:r>
-          </a:p>
-          <a:p>
-            <a:pPr>
-              <a:spcAft>
-                <a:spcPts val="600"/>
-              </a:spcAft>
-            </a:pPr>
-            <a:r>
-              <a:rPr sz="1500">
-                <a:solidFill>
-                  <a:srgbClr val="22282E"/>
-                </a:solidFill>
-              </a:rPr>
-              <a:t>•  Redacta el entregable final esperado por el cliente en una frase.</a:t>
+              <a:t>•  Término — Definición concisa</a:t>
+            </a:r>
+          </a:p>
+          <a:p>
+            <a:pPr>
+              <a:spcAft>
+                <a:spcPts val="600"/>
+              </a:spcAft>
+            </a:pPr>
+            <a:r>
+              <a:rPr sz="1500">
+                <a:solidFill>
+                  <a:srgbClr val="22282E"/>
+                </a:solidFill>
+              </a:rPr>
+              <a:t>•  Metodología — Proceso repetible que da cobertura, defensa legal y valor</a:t>
+            </a:r>
+          </a:p>
+          <a:p>
+            <a:pPr>
+              <a:spcAft>
+                <a:spcPts val="600"/>
+              </a:spcAft>
+            </a:pPr>
+            <a:r>
+              <a:rPr sz="1500">
+                <a:solidFill>
+                  <a:srgbClr val="22282E"/>
+                </a:solidFill>
+              </a:rPr>
+              <a:t>•  PTES — Estándar de facto en siete fases para estructurar un pentest</a:t>
+            </a:r>
+          </a:p>
+          <a:p>
+            <a:pPr>
+              <a:spcAft>
+                <a:spcPts val="600"/>
+              </a:spcAft>
+            </a:pPr>
+            <a:r>
+              <a:rPr sz="1500">
+                <a:solidFill>
+                  <a:srgbClr val="22282E"/>
+                </a:solidFill>
+              </a:rPr>
+              <a:t>•  OSSTMM — Metodología con métricas (RAV) y enfoque científico</a:t>
+            </a:r>
+          </a:p>
+          <a:p>
+            <a:pPr>
+              <a:spcAft>
+                <a:spcPts val="600"/>
+              </a:spcAft>
+            </a:pPr>
+            <a:r>
+              <a:rPr sz="1500">
+                <a:solidFill>
+                  <a:srgbClr val="22282E"/>
+                </a:solidFill>
+              </a:rPr>
+              <a:t>•  NIST SP 800-115 — Guía oficial de pruebas de seguridad para cumplimiento</a:t>
+            </a:r>
+          </a:p>
+          <a:p>
+            <a:pPr>
+              <a:spcAft>
+                <a:spcPts val="600"/>
+              </a:spcAft>
+            </a:pPr>
+            <a:r>
+              <a:rPr sz="1500">
+                <a:solidFill>
+                  <a:srgbClr val="22282E"/>
+                </a:solidFill>
+              </a:rPr>
+              <a:t>•  OWASP WSTG — Guía de pruebas de seguridad para aplicaciones web</a:t>
+            </a:r>
+          </a:p>
+          <a:p>
+            <a:pPr>
+              <a:spcAft>
+                <a:spcPts val="600"/>
+              </a:spcAft>
+            </a:pPr>
+            <a:r>
+              <a:rPr sz="1500">
+                <a:solidFill>
+                  <a:srgbClr val="22282E"/>
+                </a:solidFill>
+              </a:rPr>
+              <a:t>•  Análisis de vulnerabilidades — Identificar debilidades sin explotarlas; amplitud</a:t>
             </a:r>
           </a:p>
         </p:txBody>
@@ -4674,7 +5065,7 @@
                   <a:srgbClr val="0B3D2E"/>
                 </a:solidFill>
               </a:rPr>
-              <a:t>✍️ Ejercicios</a:t>
+              <a:t>🧰 Herramientas y preparación</a:t>
             </a:r>
           </a:p>
         </p:txBody>
@@ -4712,97 +5103,67 @@
                   <a:srgbClr val="22282E"/>
                 </a:solidFill>
               </a:rPr>
-              <a:t>•  Escribe con tus palabras la diferencia entre PTES y OSSTMM en menos de 80 palabras.</a:t>
-            </a:r>
-          </a:p>
-          <a:p>
-            <a:pPr>
-              <a:spcAft>
-                <a:spcPts val="600"/>
-              </a:spcAft>
-            </a:pPr>
-            <a:r>
-              <a:rPr sz="1500">
-                <a:solidFill>
-                  <a:srgbClr val="22282E"/>
-                </a:solidFill>
-              </a:rPr>
-              <a:t>•  Clasifica estas tareas por fase PTES: "buscar correos en LinkedIn", "lanzar un exploit SMB", "escribir el resumen ejecutivo".</a:t>
-            </a:r>
-          </a:p>
-          <a:p>
-            <a:pPr>
-              <a:spcAft>
-                <a:spcPts val="600"/>
-              </a:spcAft>
-            </a:pPr>
-            <a:r>
-              <a:rPr sz="1500">
-                <a:solidFill>
-                  <a:srgbClr val="22282E"/>
-                </a:solidFill>
-              </a:rPr>
-              <a:t>•  Diseña un plan de fases para un test white box de una API interna.</a:t>
-            </a:r>
-          </a:p>
-          <a:p>
-            <a:pPr>
-              <a:spcAft>
-                <a:spcPts val="600"/>
-              </a:spcAft>
-            </a:pPr>
-            <a:r>
-              <a:rPr sz="1500">
-                <a:solidFill>
-                  <a:srgbClr val="22282E"/>
-                </a:solidFill>
-              </a:rPr>
-              <a:t>•  Explica cuándo recomendarías un red team en lugar de un pentest tradicional.</a:t>
-            </a:r>
-          </a:p>
-          <a:p>
-            <a:pPr>
-              <a:spcAft>
-                <a:spcPts val="600"/>
-              </a:spcAft>
-            </a:pPr>
-            <a:r>
-              <a:rPr sz="1500">
-                <a:solidFill>
-                  <a:srgbClr val="22282E"/>
-                </a:solidFill>
-              </a:rPr>
-              <a:t>•  Construye una tabla comparativa de PTES, OSSTMM, NIST 800-115 y OWASP WSTG con al menos tres criterios.</a:t>
-            </a:r>
-          </a:p>
-          <a:p>
-            <a:pPr>
-              <a:spcAft>
-                <a:spcPts val="600"/>
-              </a:spcAft>
-            </a:pPr>
-            <a:r>
-              <a:rPr sz="1500">
-                <a:solidFill>
-                  <a:srgbClr val="22282E"/>
-                </a:solidFill>
-              </a:rPr>
-              <a:t>•  Redacta el argumento de una diapositiva que convenza a un cliente escéptico de pagar por metodología.</a:t>
-            </a:r>
-          </a:p>
-          <a:p>
-            <a:pPr>
-              <a:spcAft>
-                <a:spcPts val="600"/>
-              </a:spcAft>
-            </a:pPr>
-            <a:r>
-              <a:rPr sz="1500">
-                <a:solidFill>
-                  <a:srgbClr val="22282E"/>
-                </a:solidFill>
-              </a:rPr>
-              <a:t>•  Investiga qué es el CMM (Capability Maturity Model) aplicado a seguridad y relaciona un nivel de madurez con el tipo de test recomendado.</a:t>
+              <a:t>•  Esta clase es metodológica, no ofensiva: no se ataca ningún sistema. Prepara:</a:t>
+            </a:r>
+          </a:p>
+          <a:p>
+            <a:pPr>
+              <a:spcAft>
+                <a:spcPts val="600"/>
+              </a:spcAft>
+            </a:pPr>
+            <a:r>
+              <a:rPr sz="1500">
+                <a:solidFill>
+                  <a:srgbClr val="22282E"/>
+                </a:solidFill>
+              </a:rPr>
+              <a:t>•  Los documentos de referencia: PTES (pentest-standard.org), OSSTMM 3 (PDF de ISECOM), NIST SP 800-115 y OWASP WSTG.</a:t>
+            </a:r>
+          </a:p>
+          <a:p>
+            <a:pPr>
+              <a:spcAft>
+                <a:spcPts val="600"/>
+              </a:spcAft>
+            </a:pPr>
+            <a:r>
+              <a:rPr sz="1500">
+                <a:solidFill>
+                  <a:srgbClr val="22282E"/>
+                </a:solidFill>
+              </a:rPr>
+              <a:t>•  Una plantilla de plan de engagement (hoja de cálculo o documento) con columnas: fase, actividades, herramientas previstas, entregable, duración.</a:t>
+            </a:r>
+          </a:p>
+          <a:p>
+            <a:pPr>
+              <a:spcAft>
+                <a:spcPts val="600"/>
+              </a:spcAft>
+            </a:pPr>
+            <a:r>
+              <a:rPr sz="1500">
+                <a:solidFill>
+                  <a:srgbClr val="22282E"/>
+                </a:solidFill>
+              </a:rPr>
+              <a:t>•  Un gestor de notas para pentest (CherryTree, Obsidian o un repositorio Markdown) que usarás durante toda la parte.</a:t>
+            </a:r>
+          </a:p>
+          <a:p>
+            <a:pPr>
+              <a:spcAft>
+                <a:spcPts val="600"/>
+              </a:spcAft>
+            </a:pPr>
+            <a:r>
+              <a:rPr sz="1500">
+                <a:solidFill>
+                  <a:srgbClr val="22282E"/>
+                </a:solidFill>
+              </a:rPr>
+              <a:t>•  Un "playbook interno" propio: una carpeta versionada donde acumules plantillas de RoE, checklists de fases y modelos de informe, para no reinventar el proceso en cada clase.</a:t>
             </a:r>
           </a:p>
         </p:txBody>
@@ -4853,7 +5214,7 @@
                   <a:srgbClr val="0B3D2E"/>
                 </a:solidFill>
               </a:rPr>
-              <a:t>📝 Reto verificable</a:t>
+              <a:t>🧪 Laboratorio guiado (ejercicio aplicado)</a:t>
             </a:r>
           </a:p>
         </p:txBody>
@@ -4891,22 +5252,97 @@
                   <a:srgbClr val="22282E"/>
                 </a:solidFill>
               </a:rPr>
-              <a:t>•  Produce un documento de plan de engagement de una página para un caso a tu elección que incluya: las 7 fases PTES con actividades, el tipo de test, el alcance con exclusiones, una métrica OSSTMM y el entregable.</a:t>
-            </a:r>
-          </a:p>
-          <a:p>
-            <a:pPr>
-              <a:spcAft>
-                <a:spcPts val="600"/>
-              </a:spcAft>
-            </a:pPr>
-            <a:r>
-              <a:rPr sz="1500">
-                <a:solidFill>
-                  <a:srgbClr val="22282E"/>
-                </a:solidFill>
-              </a:rPr>
-              <a:t>•  Criterio de aceptación: el documento contiene las siete fases nombradas correctamente, un alcance con al menos una exclusión explícita y una métrica cuantitativa; otra persona podría leerlo y saber qué se hará y qué no.</a:t>
+              <a:t>•  Como esta clase es conceptual, el laboratorio es un ejercicio de planificación.</a:t>
+            </a:r>
+          </a:p>
+          <a:p>
+            <a:pPr>
+              <a:spcAft>
+                <a:spcPts val="600"/>
+              </a:spcAft>
+            </a:pPr>
+            <a:r>
+              <a:rPr sz="1500">
+                <a:solidFill>
+                  <a:srgbClr val="22282E"/>
+                </a:solidFill>
+              </a:rPr>
+              <a:t>•  Toma un caso ficticio: "Pyme de e-commerce, 2 servidores web públicos, 1 rango interno /24, quieren saber si un atacante externo llega a la base de datos de clientes".</a:t>
+            </a:r>
+          </a:p>
+          <a:p>
+            <a:pPr>
+              <a:spcAft>
+                <a:spcPts val="600"/>
+              </a:spcAft>
+            </a:pPr>
+            <a:r>
+              <a:rPr sz="1500">
+                <a:solidFill>
+                  <a:srgbClr val="22282E"/>
+                </a:solidFill>
+              </a:rPr>
+              <a:t>•  Crea una tabla con las siete fases del PTES y rellena, para cada una, dos actividades concretas que harías en este caso.</a:t>
+            </a:r>
+          </a:p>
+          <a:p>
+            <a:pPr>
+              <a:spcAft>
+                <a:spcPts val="600"/>
+              </a:spcAft>
+            </a:pPr>
+            <a:r>
+              <a:rPr sz="1500">
+                <a:solidFill>
+                  <a:srgbClr val="22282E"/>
+                </a:solidFill>
+              </a:rPr>
+              <a:t>•  Define el tipo de test (black/gray/white box) y justifica tu elección en 3 líneas.</a:t>
+            </a:r>
+          </a:p>
+          <a:p>
+            <a:pPr>
+              <a:spcAft>
+                <a:spcPts val="600"/>
+              </a:spcAft>
+            </a:pPr>
+            <a:r>
+              <a:rPr sz="1500">
+                <a:solidFill>
+                  <a:srgbClr val="22282E"/>
+                </a:solidFill>
+              </a:rPr>
+              <a:t>•  Especifica el alcance: qué IPs/dominios entran, qué queda excluido, ventana horaria y técnicas prohibidas (por ejemplo, denegación de servicio).</a:t>
+            </a:r>
+          </a:p>
+          <a:p>
+            <a:pPr>
+              <a:spcAft>
+                <a:spcPts val="600"/>
+              </a:spcAft>
+            </a:pPr>
+            <a:r>
+              <a:rPr sz="1500">
+                <a:solidFill>
+                  <a:srgbClr val="22282E"/>
+                </a:solidFill>
+              </a:rPr>
+              <a:t>•  Para el mismo caso, describe una métrica OSSTMM que reportarías (por ejemplo, número de servicios expuestos vs. controlados).</a:t>
+            </a:r>
+          </a:p>
+          <a:p>
+            <a:pPr>
+              <a:spcAft>
+                <a:spcPts val="600"/>
+              </a:spcAft>
+            </a:pPr>
+            <a:r>
+              <a:rPr sz="1500">
+                <a:solidFill>
+                  <a:srgbClr val="22282E"/>
+                </a:solidFill>
+              </a:rPr>
+              <a:t>•  Redacta el entregable final esperado por el cliente en una frase.</a:t>
             </a:r>
           </a:p>
         </p:txBody>
